--- a/tests/data/simple.pptx
+++ b/tests/data/simple.pptx
@@ -3126,7 +3126,7 @@
           <a:lstStyle/>
           <a:p>
             <a:r>
-              <a:t>A simple subtitle</a:t>
+              <a:t>Eine einfache Präsentation zu Testzwecken. Sie enthält eine Titelfolie, um grundlegende Konvertierungen und Metadaten-Extraktionen prüfen zu können, und illustriert ein einfaches Bullet-Point Layout.</a:t>
             </a:r>
           </a:p>
         </p:txBody>
